--- a/assets/figures-editable/c3-c4/c4-e01.pptx
+++ b/assets/figures-editable/c3-c4/c4-e01.pptx
@@ -3104,8 +3104,8 @@
         </p:nvSpPr>
         <p:spPr>
           <a:xfrm>
-            <a:off x="274320" y="137160"/>
-            <a:ext cx="11612880" cy="365760"/>
+            <a:off x="274320" y="118872"/>
+            <a:ext cx="11612880" cy="340105"/>
           </a:xfrm>
           <a:prstGeom prst="rect">
             <a:avLst/>
@@ -3114,7 +3114,7 @@
           <a:effectLst/>
         </p:spPr>
         <p:txBody>
-          <a:bodyPr wrap="square" lIns="27432" rIns="27432" tIns="18288" bIns="18288" anchor="ctr">
+          <a:bodyPr wrap="none" lIns="18288" rIns="18288" tIns="18288" bIns="18288" anchor="t">
             <a:spAutoFit/>
           </a:bodyPr>
           <a:lstStyle/>
@@ -3125,7 +3125,7 @@
               </a:spcAft>
             </a:pPr>
             <a:r>
-              <a:rPr sz="2100" b="0" i="0">
+              <a:rPr sz="1900" b="1" i="0">
                 <a:solidFill>
                   <a:srgbClr val="8EDBD4"/>
                 </a:solidFill>
@@ -3138,24 +3138,24 @@
       </p:sp>
       <p:sp>
         <p:nvSpPr>
-          <p:cNvPr id="3" name="C4-E01 rect 1" descr="sci-ppt:o001"/>
+          <p:cNvPr id="3" name="C4-E01 round_rect 1" descr="sci-ppt:o001"/>
           <p:cNvSpPr/>
           <p:nvPr/>
         </p:nvSpPr>
         <p:spPr>
           <a:xfrm>
-            <a:off x="1005840" y="1280160"/>
-            <a:ext cx="9144000" cy="365760"/>
-          </a:xfrm>
-          <a:prstGeom prst="rect">
+            <a:off x="365760" y="914400"/>
+            <a:ext cx="6766560" cy="4846320"/>
+          </a:xfrm>
+          <a:prstGeom prst="roundRect">
             <a:avLst/>
           </a:prstGeom>
           <a:solidFill>
             <a:srgbClr val="213E4B"/>
           </a:solidFill>
-          <a:ln w="19050">
+          <a:ln w="20320">
             <a:solidFill>
-              <a:srgbClr val="B4C7D2"/>
+              <a:srgbClr val="8EDBD4"/>
             </a:solidFill>
           </a:ln>
           <a:effectLst/>
@@ -3168,23 +3168,211 @@
           </a:p>
         </p:txBody>
       </p:sp>
+      <p:sp>
+        <p:nvSpPr>
+          <p:cNvPr id="4" name="C4-E01 text 2" descr="sci-ppt:o002"/>
+          <p:cNvSpPr txBox="1"/>
+          <p:nvPr/>
+        </p:nvSpPr>
+        <p:spPr>
+          <a:xfrm>
+            <a:off x="475488" y="969264"/>
+            <a:ext cx="6547104" cy="254889"/>
+          </a:xfrm>
+          <a:prstGeom prst="rect">
+            <a:avLst/>
+          </a:prstGeom>
+          <a:noFill/>
+          <a:effectLst/>
+        </p:spPr>
+        <p:txBody>
+          <a:bodyPr wrap="none" lIns="18288" rIns="18288" tIns="18288" bIns="18288" anchor="t">
+            <a:spAutoFit/>
+          </a:bodyPr>
+          <a:lstStyle/>
+          <a:p>
+            <a:pPr algn="l">
+              <a:spcAft>
+                <a:spcPts val="0"/>
+              </a:spcAft>
+            </a:pPr>
+            <a:r>
+              <a:rPr sz="1350" b="1" i="0">
+                <a:solidFill>
+                  <a:srgbClr val="8EDBD4"/>
+                </a:solidFill>
+                <a:latin typeface="Arial"/>
+              </a:rPr>
+              <a:t>Traction on the exposed film face</a:t>
+            </a:r>
+          </a:p>
+        </p:txBody>
+      </p:sp>
+      <p:sp>
+        <p:nvSpPr>
+          <p:cNvPr id="5" name="C4-E01 rect 3" descr="sci-ppt:o003"/>
+          <p:cNvSpPr/>
+          <p:nvPr/>
+        </p:nvSpPr>
+        <p:spPr>
+          <a:xfrm>
+            <a:off x="731520" y="3127248"/>
+            <a:ext cx="6035040" cy="1078992"/>
+          </a:xfrm>
+          <a:prstGeom prst="rect">
+            <a:avLst/>
+          </a:prstGeom>
+          <a:solidFill>
+            <a:srgbClr val="1E4A5A"/>
+          </a:solidFill>
+          <a:ln w="12700">
+            <a:solidFill>
+              <a:srgbClr val="2B6678"/>
+            </a:solidFill>
+          </a:ln>
+          <a:effectLst/>
+        </p:spPr>
+        <p:txBody>
+          <a:bodyPr rtlCol="0" anchor="ctr"/>
+          <a:lstStyle/>
+          <a:p>
+            <a:pPr algn="ctr"/>
+          </a:p>
+        </p:txBody>
+      </p:sp>
+      <p:sp>
+        <p:nvSpPr>
+          <p:cNvPr id="6" name="C4-E01 rect 4" descr="sci-ppt:o004"/>
+          <p:cNvSpPr/>
+          <p:nvPr/>
+        </p:nvSpPr>
+        <p:spPr>
+          <a:xfrm>
+            <a:off x="731520" y="1463040"/>
+            <a:ext cx="6035040" cy="1463040"/>
+          </a:xfrm>
+          <a:prstGeom prst="rect">
+            <a:avLst/>
+          </a:prstGeom>
+          <a:solidFill>
+            <a:srgbClr val="3A5362">
+              <a:alpha val="80000"/>
+            </a:srgbClr>
+          </a:solidFill>
+          <a:ln w="15240">
+            <a:solidFill>
+              <a:srgbClr val="B4C7D2">
+                <a:alpha val="80000"/>
+              </a:srgbClr>
+            </a:solidFill>
+          </a:ln>
+          <a:effectLst/>
+        </p:spPr>
+        <p:txBody>
+          <a:bodyPr rtlCol="0" anchor="ctr"/>
+          <a:lstStyle/>
+          <a:p>
+            <a:pPr algn="ctr"/>
+          </a:p>
+        </p:txBody>
+      </p:sp>
+      <p:sp>
+        <p:nvSpPr>
+          <p:cNvPr id="7" name="C4-E01 text 5" descr="sci-ppt:o005"/>
+          <p:cNvSpPr txBox="1"/>
+          <p:nvPr/>
+        </p:nvSpPr>
+        <p:spPr>
+          <a:xfrm>
+            <a:off x="822960" y="1554480"/>
+            <a:ext cx="2743200" cy="231648"/>
+          </a:xfrm>
+          <a:prstGeom prst="rect">
+            <a:avLst/>
+          </a:prstGeom>
+          <a:noFill/>
+          <a:effectLst/>
+        </p:spPr>
+        <p:txBody>
+          <a:bodyPr wrap="none" lIns="18288" rIns="18288" tIns="18288" bIns="18288" anchor="t">
+            <a:spAutoFit/>
+          </a:bodyPr>
+          <a:lstStyle/>
+          <a:p>
+            <a:pPr algn="l">
+              <a:spcAft>
+                <a:spcPts val="0"/>
+              </a:spcAft>
+            </a:pPr>
+            <a:r>
+              <a:rPr sz="1200" b="1" i="0">
+                <a:solidFill>
+                  <a:srgbClr val="B4C7D2"/>
+                </a:solidFill>
+                <a:latin typeface="Arial"/>
+              </a:rPr>
+              <a:t>solid film</a:t>
+            </a:r>
+          </a:p>
+        </p:txBody>
+      </p:sp>
+      <p:sp>
+        <p:nvSpPr>
+          <p:cNvPr id="8" name="C4-E01 text 6" descr="sci-ppt:o006"/>
+          <p:cNvSpPr txBox="1"/>
+          <p:nvPr/>
+        </p:nvSpPr>
+        <p:spPr>
+          <a:xfrm>
+            <a:off x="822960" y="3291840"/>
+            <a:ext cx="2743200" cy="231648"/>
+          </a:xfrm>
+          <a:prstGeom prst="rect">
+            <a:avLst/>
+          </a:prstGeom>
+          <a:noFill/>
+          <a:effectLst/>
+        </p:spPr>
+        <p:txBody>
+          <a:bodyPr wrap="none" lIns="18288" rIns="18288" tIns="18288" bIns="18288" anchor="t">
+            <a:spAutoFit/>
+          </a:bodyPr>
+          <a:lstStyle/>
+          <a:p>
+            <a:pPr algn="l">
+              <a:spcAft>
+                <a:spcPts val="0"/>
+              </a:spcAft>
+            </a:pPr>
+            <a:r>
+              <a:rPr sz="1200" b="1" i="0">
+                <a:solidFill>
+                  <a:srgbClr val="8EDBD4"/>
+                </a:solidFill>
+                <a:latin typeface="Arial"/>
+              </a:rPr>
+              <a:t>liquid</a:t>
+            </a:r>
+          </a:p>
+        </p:txBody>
+      </p:sp>
       <p:cxnSp>
         <p:nvCxnSpPr>
-          <p:cNvPr id="4" name="C4-E01 arrow 2" descr="sci-ppt:o002"/>
+          <p:cNvPr id="9" name="C4-E01 arrow 7" descr="sci-ppt:o007"/>
           <p:cNvCxnSpPr/>
           <p:nvPr/>
         </p:nvCxnSpPr>
         <p:spPr>
           <a:xfrm flipV="1">
-            <a:off x="2743200" y="1737360"/>
-            <a:ext cx="0" cy="1097280"/>
+            <a:off x="2011680" y="2194560"/>
+            <a:ext cx="0" cy="731520"/>
           </a:xfrm>
           <a:prstGeom prst="line">
             <a:avLst/>
           </a:prstGeom>
-          <a:ln w="25400">
+          <a:ln w="38100">
             <a:solidFill>
-              <a:srgbClr val="8EDBD4"/>
+              <a:srgbClr val="F2B880"/>
             </a:solidFill>
             <a:headEnd type="none" w="med" len="med"/>
             <a:tailEnd type="triangle" w="med" len="med"/>
@@ -3192,23 +3380,63 @@
           <a:effectLst/>
         </p:spPr>
       </p:cxnSp>
+      <p:sp>
+        <p:nvSpPr>
+          <p:cNvPr id="10" name="C4-E01 text 8" descr="sci-ppt:o008"/>
+          <p:cNvSpPr txBox="1"/>
+          <p:nvPr/>
+        </p:nvSpPr>
+        <p:spPr>
+          <a:xfrm>
+            <a:off x="914400" y="2286000"/>
+            <a:ext cx="1097280" cy="231648"/>
+          </a:xfrm>
+          <a:prstGeom prst="rect">
+            <a:avLst/>
+          </a:prstGeom>
+          <a:noFill/>
+          <a:effectLst/>
+        </p:spPr>
+        <p:txBody>
+          <a:bodyPr wrap="none" lIns="18288" rIns="18288" tIns="18288" bIns="18288" anchor="t">
+            <a:spAutoFit/>
+          </a:bodyPr>
+          <a:lstStyle/>
+          <a:p>
+            <a:pPr algn="r">
+              <a:spcAft>
+                <a:spcPts val="0"/>
+              </a:spcAft>
+            </a:pPr>
+            <a:r>
+              <a:rPr sz="1200" b="1" i="0">
+                <a:solidFill>
+                  <a:srgbClr val="F2B880"/>
+                </a:solidFill>
+                <a:latin typeface="Arial"/>
+              </a:rPr>
+              <a:t>n_f</a:t>
+            </a:r>
+          </a:p>
+        </p:txBody>
+      </p:sp>
       <p:cxnSp>
         <p:nvCxnSpPr>
-          <p:cNvPr id="5" name="C4-E01 arrow 3" descr="sci-ppt:o003"/>
+          <p:cNvPr id="11" name="C4-E01 arrow 9" descr="sci-ppt:o009"/>
           <p:cNvCxnSpPr/>
           <p:nvPr/>
         </p:nvCxnSpPr>
         <p:spPr>
-          <a:xfrm flipV="1">
-            <a:off x="5486400" y="1737360"/>
-            <a:ext cx="0" cy="1097280"/>
+          <a:xfrm>
+            <a:off x="4023360" y="2971800"/>
+            <a:ext cx="0" cy="868680"/>
           </a:xfrm>
           <a:prstGeom prst="line">
             <a:avLst/>
           </a:prstGeom>
-          <a:ln w="25400">
+          <a:ln w="44450">
             <a:solidFill>
-              <a:srgbClr val="8EDBD4"/>
+              <a:srgbClr val="F28BA0"/>
             </a:solidFill>
             <a:headEnd type="none" w="med" len="med"/>
             <a:tailEnd type="triangle" w="med" len="med"/>
@@ -3216,23 +3444,63 @@
           <a:effectLst/>
         </p:spPr>
       </p:cxnSp>
+      <p:sp>
+        <p:nvSpPr>
+          <p:cNvPr id="12" name="C4-E01 text 10" descr="sci-ppt:o010"/>
+          <p:cNvSpPr txBox="1"/>
+          <p:nvPr/>
+        </p:nvSpPr>
+        <p:spPr>
+          <a:xfrm>
+            <a:off x="4160520" y="3611880"/>
+            <a:ext cx="2468880" cy="223900"/>
+          </a:xfrm>
+          <a:prstGeom prst="rect">
+            <a:avLst/>
+          </a:prstGeom>
+          <a:noFill/>
+          <a:effectLst/>
+        </p:spPr>
+        <p:txBody>
+          <a:bodyPr wrap="none" lIns="18288" rIns="18288" tIns="18288" bIns="18288" anchor="t">
+            <a:spAutoFit/>
+          </a:bodyPr>
+          <a:lstStyle/>
+          <a:p>
+            <a:pPr algn="l">
+              <a:spcAft>
+                <a:spcPts val="0"/>
+              </a:spcAft>
+            </a:pPr>
+            <a:r>
+              <a:rPr sz="1150" b="1" i="0">
+                <a:solidFill>
+                  <a:srgbClr val="F28BA0"/>
+                </a:solidFill>
+                <a:latin typeface="Arial"/>
+              </a:rPr>
+              <a:t>normal part −p n</a:t>
+            </a:r>
+          </a:p>
+        </p:txBody>
+      </p:sp>
       <p:cxnSp>
         <p:nvCxnSpPr>
-          <p:cNvPr id="6" name="C4-E01 arrow 4" descr="sci-ppt:o004"/>
+          <p:cNvPr id="13" name="C4-E01 arrow 11" descr="sci-ppt:o011"/>
           <p:cNvCxnSpPr/>
           <p:nvPr/>
         </p:nvCxnSpPr>
         <p:spPr>
-          <a:xfrm flipV="1">
-            <a:off x="8229600" y="1737360"/>
-            <a:ext cx="0" cy="1097280"/>
+          <a:xfrm>
+            <a:off x="4572000" y="2834640"/>
+            <a:ext cx="1280160" cy="0"/>
           </a:xfrm>
           <a:prstGeom prst="line">
             <a:avLst/>
           </a:prstGeom>
-          <a:ln w="25400">
+          <a:ln w="44450">
             <a:solidFill>
-              <a:srgbClr val="8EDBD4"/>
+              <a:srgbClr val="7FC8F8"/>
             </a:solidFill>
             <a:headEnd type="none" w="med" len="med"/>
             <a:tailEnd type="triangle" w="med" len="med"/>
@@ -3240,40 +3508,16 @@
           <a:effectLst/>
         </p:spPr>
       </p:cxnSp>
-      <p:cxnSp>
-        <p:nvCxnSpPr>
-          <p:cNvPr id="7" name="C4-E01 arrow 5" descr="sci-ppt:o005"/>
-          <p:cNvCxnSpPr/>
-          <p:nvPr/>
-        </p:nvCxnSpPr>
-        <p:spPr>
-          <a:xfrm>
-            <a:off x="9601200" y="1691640"/>
-            <a:ext cx="0" cy="868680"/>
-          </a:xfrm>
-          <a:prstGeom prst="line">
-            <a:avLst/>
-          </a:prstGeom>
-          <a:ln w="25400">
-            <a:solidFill>
-              <a:srgbClr val="8EDBD4"/>
-            </a:solidFill>
-            <a:headEnd type="none" w="med" len="med"/>
-            <a:tailEnd type="triangle" w="med" len="med"/>
-          </a:ln>
-          <a:effectLst/>
-        </p:spPr>
-      </p:cxnSp>
-      <p:sp>
-        <p:nvSpPr>
-          <p:cNvPr id="8" name="C4-E01 text 6" descr="sci-ppt:o006"/>
+      <p:sp>
+        <p:nvSpPr>
+          <p:cNvPr id="14" name="C4-E01 text 12" descr="sci-ppt:o012"/>
           <p:cNvSpPr txBox="1"/>
           <p:nvPr/>
         </p:nvSpPr>
         <p:spPr>
           <a:xfrm>
-            <a:off x="9829800" y="2011680"/>
-            <a:ext cx="1828800" cy="548640"/>
+            <a:off x="4572000" y="2331720"/>
+            <a:ext cx="2194560" cy="223900"/>
           </a:xfrm>
           <a:prstGeom prst="rect">
             <a:avLst/>
@@ -3282,7 +3526,7 @@
           <a:effectLst/>
         </p:spPr>
         <p:txBody>
-          <a:bodyPr wrap="square" lIns="27432" rIns="27432" tIns="18288" bIns="18288" anchor="ctr">
+          <a:bodyPr wrap="none" lIns="18288" rIns="18288" tIns="18288" bIns="18288" anchor="t">
             <a:spAutoFit/>
           </a:bodyPr>
           <a:lstStyle/>
@@ -3293,15 +3537,79 @@
               </a:spcAft>
             </a:pPr>
             <a:r>
-              <a:rPr sz="1600" b="0" i="0">
+              <a:rPr sz="1150" b="1" i="0">
+                <a:solidFill>
+                  <a:srgbClr val="7FC8F8"/>
+                </a:solidFill>
+                <a:latin typeface="Arial"/>
+              </a:rPr>
+              <a:t>shear part 2μ D·n</a:t>
+            </a:r>
+          </a:p>
+        </p:txBody>
+      </p:sp>
+      <p:sp>
+        <p:nvSpPr>
+          <p:cNvPr id="15" name="C4-E01 text 13" descr="sci-ppt:o013"/>
+          <p:cNvSpPr txBox="1"/>
+          <p:nvPr/>
+        </p:nvSpPr>
+        <p:spPr>
+          <a:xfrm>
+            <a:off x="548640" y="4709160"/>
+            <a:ext cx="6400800" cy="239395"/>
+          </a:xfrm>
+          <a:prstGeom prst="rect">
+            <a:avLst/>
+          </a:prstGeom>
+          <a:noFill/>
+          <a:effectLst/>
+        </p:spPr>
+        <p:txBody>
+          <a:bodyPr wrap="none" lIns="18288" rIns="18288" tIns="18288" bIns="18288" anchor="t">
+            <a:spAutoFit/>
+          </a:bodyPr>
+          <a:lstStyle/>
+          <a:p>
+            <a:pPr algn="l">
+              <a:spcAft>
+                <a:spcPts val="0"/>
+              </a:spcAft>
+            </a:pPr>
+            <a:r>
+              <a:rPr sz="1250" b="1" i="0">
                 <a:solidFill>
                   <a:srgbClr val="E7F0F3"/>
                 </a:solidFill>
                 <a:latin typeface="Arial"/>
               </a:rPr>
-              <a:t>n_f ↓</a:t>
-            </a:r>
-          </a:p>
+              <a:t>Dᵤ = (∇u + ∇uᵀ)/2,   Tₗ = −pI + 2μDᵤ,   tₗ = Tₗ n_f</a:t>
+            </a:r>
+          </a:p>
+        </p:txBody>
+      </p:sp>
+      <p:sp>
+        <p:nvSpPr>
+          <p:cNvPr id="16" name="C4-E01 text 14" descr="sci-ppt:o014"/>
+          <p:cNvSpPr txBox="1"/>
+          <p:nvPr/>
+        </p:nvSpPr>
+        <p:spPr>
+          <a:xfrm>
+            <a:off x="548640" y="5166360"/>
+            <a:ext cx="6400800" cy="231648"/>
+          </a:xfrm>
+          <a:prstGeom prst="rect">
+            <a:avLst/>
+          </a:prstGeom>
+          <a:noFill/>
+          <a:effectLst/>
+        </p:spPr>
+        <p:txBody>
+          <a:bodyPr wrap="none" lIns="18288" rIns="18288" tIns="18288" bIns="18288" anchor="t">
+            <a:spAutoFit/>
+          </a:bodyPr>
+          <a:lstStyle/>
           <a:p>
             <a:pPr algn="l">
               <a:spcAft>
@@ -3309,27 +3617,175 @@
               </a:spcAft>
             </a:pPr>
             <a:r>
-              <a:rPr sz="1600" b="0" i="0">
+              <a:rPr sz="1200" b="0" i="0">
+                <a:solidFill>
+                  <a:srgbClr val="B4C7D2"/>
+                </a:solidFill>
+                <a:latin typeface="Arial"/>
+              </a:rPr>
+              <a:t>The normal fixes the sign: positive pressure presses on the film.</a:t>
+            </a:r>
+          </a:p>
+        </p:txBody>
+      </p:sp>
+      <p:sp>
+        <p:nvSpPr>
+          <p:cNvPr id="17" name="C4-E01 round_rect 15" descr="sci-ppt:o015"/>
+          <p:cNvSpPr/>
+          <p:nvPr/>
+        </p:nvSpPr>
+        <p:spPr>
+          <a:xfrm>
+            <a:off x="7315200" y="914400"/>
+            <a:ext cx="4526280" cy="4846320"/>
+          </a:xfrm>
+          <a:prstGeom prst="roundRect">
+            <a:avLst/>
+          </a:prstGeom>
+          <a:solidFill>
+            <a:srgbClr val="213E4B"/>
+          </a:solidFill>
+          <a:ln w="20320">
+            <a:solidFill>
+              <a:srgbClr val="8EDBD4"/>
+            </a:solidFill>
+          </a:ln>
+          <a:effectLst/>
+        </p:spPr>
+        <p:txBody>
+          <a:bodyPr rtlCol="0" anchor="ctr"/>
+          <a:lstStyle/>
+          <a:p>
+            <a:pPr algn="ctr"/>
+          </a:p>
+        </p:txBody>
+      </p:sp>
+      <p:sp>
+        <p:nvSpPr>
+          <p:cNvPr id="18" name="C4-E01 text 16" descr="sci-ppt:o016"/>
+          <p:cNvSpPr txBox="1"/>
+          <p:nvPr/>
+        </p:nvSpPr>
+        <p:spPr>
+          <a:xfrm>
+            <a:off x="7424927" y="969264"/>
+            <a:ext cx="4306824" cy="254889"/>
+          </a:xfrm>
+          <a:prstGeom prst="rect">
+            <a:avLst/>
+          </a:prstGeom>
+          <a:noFill/>
+          <a:effectLst/>
+        </p:spPr>
+        <p:txBody>
+          <a:bodyPr wrap="none" lIns="18288" rIns="18288" tIns="18288" bIns="18288" anchor="t">
+            <a:spAutoFit/>
+          </a:bodyPr>
+          <a:lstStyle/>
+          <a:p>
+            <a:pPr algn="l">
+              <a:spcAft>
+                <a:spcPts val="0"/>
+              </a:spcAft>
+            </a:pPr>
+            <a:r>
+              <a:rPr sz="1350" b="1" i="0">
+                <a:solidFill>
+                  <a:srgbClr val="8EDBD4"/>
+                </a:solidFill>
+                <a:latin typeface="Arial"/>
+              </a:rPr>
+              <a:t>Two parts of one traction</a:t>
+            </a:r>
+          </a:p>
+        </p:txBody>
+      </p:sp>
+      <p:sp>
+        <p:nvSpPr>
+          <p:cNvPr id="19" name="C4-E01 text 17" descr="sci-ppt:o017"/>
+          <p:cNvSpPr txBox="1"/>
+          <p:nvPr/>
+        </p:nvSpPr>
+        <p:spPr>
+          <a:xfrm>
+            <a:off x="7452360" y="1572768"/>
+            <a:ext cx="1645919" cy="223900"/>
+          </a:xfrm>
+          <a:prstGeom prst="rect">
+            <a:avLst/>
+          </a:prstGeom>
+          <a:noFill/>
+          <a:effectLst/>
+        </p:spPr>
+        <p:txBody>
+          <a:bodyPr wrap="none" lIns="18288" rIns="18288" tIns="18288" bIns="18288" anchor="t">
+            <a:spAutoFit/>
+          </a:bodyPr>
+          <a:lstStyle/>
+          <a:p>
+            <a:pPr algn="l">
+              <a:spcAft>
+                <a:spcPts val="0"/>
+              </a:spcAft>
+            </a:pPr>
+            <a:r>
+              <a:rPr sz="1150" b="0" i="0">
                 <a:solidFill>
                   <a:srgbClr val="E7F0F3"/>
                 </a:solidFill>
                 <a:latin typeface="Arial"/>
               </a:rPr>
-              <a:t>solid → liquid</a:t>
-            </a:r>
-          </a:p>
-        </p:txBody>
-      </p:sp>
-      <p:sp>
-        <p:nvSpPr>
-          <p:cNvPr id="9" name="C4-E01 text 7" descr="sci-ppt:o007"/>
+              <a:t>pressure −p (Pa)</a:t>
+            </a:r>
+          </a:p>
+        </p:txBody>
+      </p:sp>
+      <p:sp>
+        <p:nvSpPr>
+          <p:cNvPr id="20" name="C4-E01 rect 18" descr="sci-ppt:o018"/>
+          <p:cNvSpPr/>
+          <p:nvPr/>
+        </p:nvSpPr>
+        <p:spPr>
+          <a:xfrm>
+            <a:off x="9189720" y="1554480"/>
+            <a:ext cx="1196678" cy="365760"/>
+          </a:xfrm>
+          <a:prstGeom prst="rect">
+            <a:avLst/>
+          </a:prstGeom>
+          <a:solidFill>
+            <a:srgbClr val="F28BA0">
+              <a:alpha val="85000"/>
+            </a:srgbClr>
+          </a:solidFill>
+          <a:ln w="12700">
+            <a:solidFill>
+              <a:srgbClr val="F28BA0">
+                <a:alpha val="85000"/>
+              </a:srgbClr>
+            </a:solidFill>
+          </a:ln>
+          <a:effectLst/>
+        </p:spPr>
+        <p:txBody>
+          <a:bodyPr rtlCol="0" anchor="ctr"/>
+          <a:lstStyle/>
+          <a:p>
+            <a:pPr algn="ctr"/>
+          </a:p>
+        </p:txBody>
+      </p:sp>
+      <p:sp>
+        <p:nvSpPr>
+          <p:cNvPr id="21" name="C4-E01 text 19" descr="sci-ppt:o019"/>
           <p:cNvSpPr txBox="1"/>
           <p:nvPr/>
         </p:nvSpPr>
         <p:spPr>
           <a:xfrm>
-            <a:off x="1005840" y="731520"/>
-            <a:ext cx="9144000" cy="365760"/>
+            <a:off x="10459550" y="1600200"/>
+            <a:ext cx="1371600" cy="223900"/>
           </a:xfrm>
           <a:prstGeom prst="rect">
             <a:avLst/>
@@ -3338,7 +3794,7 @@
           <a:effectLst/>
         </p:spPr>
         <p:txBody>
-          <a:bodyPr wrap="square" lIns="27432" rIns="27432" tIns="18288" bIns="18288" anchor="ctr">
+          <a:bodyPr wrap="none" lIns="18288" rIns="18288" tIns="18288" bIns="18288" anchor="t">
             <a:spAutoFit/>
           </a:bodyPr>
           <a:lstStyle/>
@@ -3349,27 +3805,27 @@
               </a:spcAft>
             </a:pPr>
             <a:r>
-              <a:rPr sz="1800" b="0" i="0">
+              <a:rPr sz="1150" b="1" i="0">
                 <a:solidFill>
                   <a:srgbClr val="E7F0F3"/>
                 </a:solidFill>
                 <a:latin typeface="Arial"/>
               </a:rPr>
-              <a:t>Film / solid; positive departure and velocity v_f ↑</a:t>
-            </a:r>
-          </a:p>
-        </p:txBody>
-      </p:sp>
-      <p:sp>
-        <p:nvSpPr>
-          <p:cNvPr id="10" name="C4-E01 text 8" descr="sci-ppt:o008"/>
+              <a:t>4.72e+07</a:t>
+            </a:r>
+          </a:p>
+        </p:txBody>
+      </p:sp>
+      <p:sp>
+        <p:nvSpPr>
+          <p:cNvPr id="22" name="C4-E01 text 20" descr="sci-ppt:o020"/>
           <p:cNvSpPr txBox="1"/>
           <p:nvPr/>
         </p:nvSpPr>
         <p:spPr>
           <a:xfrm>
-            <a:off x="1188720" y="3108960"/>
-            <a:ext cx="9144000" cy="457200"/>
+            <a:off x="7452360" y="2167128"/>
+            <a:ext cx="1645919" cy="223900"/>
           </a:xfrm>
           <a:prstGeom prst="rect">
             <a:avLst/>
@@ -3378,7 +3834,7 @@
           <a:effectLst/>
         </p:spPr>
         <p:txBody>
-          <a:bodyPr wrap="square" lIns="27432" rIns="27432" tIns="18288" bIns="18288" anchor="ctr">
+          <a:bodyPr wrap="none" lIns="18288" rIns="18288" tIns="18288" bIns="18288" anchor="t">
             <a:spAutoFit/>
           </a:bodyPr>
           <a:lstStyle/>
@@ -3389,49 +3845,63 @@
               </a:spcAft>
             </a:pPr>
             <a:r>
-              <a:rPr sz="1800" b="0" i="0">
+              <a:rPr sz="1150" b="0" i="0">
                 <a:solidFill>
-                  <a:srgbClr val="8EDBD4"/>
+                  <a:srgbClr val="E7F0F3"/>
                 </a:solidFill>
                 <a:latin typeface="Arial"/>
               </a:rPr>
-              <a:t>Liquid below: t_l = T_l n_f; pressure traction opposes n_f.</a:t>
-            </a:r>
-          </a:p>
-        </p:txBody>
-      </p:sp>
-      <p:cxnSp>
-        <p:nvCxnSpPr>
-          <p:cNvPr id="11" name="C4-E01 line 9" descr="sci-ppt:o009"/>
-          <p:cNvCxnSpPr/>
+              <a:t>viscous 2μD (Pa)</a:t>
+            </a:r>
+          </a:p>
+        </p:txBody>
+      </p:sp>
+      <p:sp>
+        <p:nvSpPr>
+          <p:cNvPr id="23" name="C4-E01 rect 21" descr="sci-ppt:o021"/>
+          <p:cNvSpPr/>
           <p:nvPr/>
-        </p:nvCxnSpPr>
-        <p:spPr>
-          <a:xfrm>
-            <a:off x="274320" y="3977639"/>
-            <a:ext cx="11612880" cy="0"/>
-          </a:xfrm>
-          <a:prstGeom prst="line">
+        </p:nvSpPr>
+        <p:spPr>
+          <a:xfrm>
+            <a:off x="9189720" y="2148840"/>
+            <a:ext cx="129334" cy="365760"/>
+          </a:xfrm>
+          <a:prstGeom prst="rect">
             <a:avLst/>
           </a:prstGeom>
+          <a:solidFill>
+            <a:srgbClr val="7FC8F8">
+              <a:alpha val="85000"/>
+            </a:srgbClr>
+          </a:solidFill>
           <a:ln w="12700">
             <a:solidFill>
-              <a:srgbClr val="405967"/>
+              <a:srgbClr val="7FC8F8">
+                <a:alpha val="85000"/>
+              </a:srgbClr>
             </a:solidFill>
           </a:ln>
           <a:effectLst/>
         </p:spPr>
-      </p:cxnSp>
-      <p:sp>
-        <p:nvSpPr>
-          <p:cNvPr id="12" name="C4-E01 text 10" descr="sci-ppt:o010"/>
+        <p:txBody>
+          <a:bodyPr rtlCol="0" anchor="ctr"/>
+          <a:lstStyle/>
+          <a:p>
+            <a:pPr algn="ctr"/>
+          </a:p>
+        </p:txBody>
+      </p:sp>
+      <p:sp>
+        <p:nvSpPr>
+          <p:cNvPr id="24" name="C4-E01 text 22" descr="sci-ppt:o022"/>
           <p:cNvSpPr txBox="1"/>
           <p:nvPr/>
         </p:nvSpPr>
         <p:spPr>
           <a:xfrm>
-            <a:off x="320040" y="4096512"/>
-            <a:ext cx="5715000" cy="246888"/>
+            <a:off x="9392206" y="2194560"/>
+            <a:ext cx="1371600" cy="223900"/>
           </a:xfrm>
           <a:prstGeom prst="rect">
             <a:avLst/>
@@ -3440,7 +3910,7 @@
           <a:effectLst/>
         </p:spPr>
         <p:txBody>
-          <a:bodyPr wrap="square" lIns="27432" rIns="27432" tIns="18288" bIns="18288" anchor="ctr">
+          <a:bodyPr wrap="none" lIns="18288" rIns="18288" tIns="18288" bIns="18288" anchor="t">
             <a:spAutoFit/>
           </a:bodyPr>
           <a:lstStyle/>
@@ -3451,27 +3921,27 @@
               </a:spcAft>
             </a:pPr>
             <a:r>
-              <a:rPr sz="1150" b="0" i="0">
+              <a:rPr sz="1150" b="1" i="0">
                 <a:solidFill>
-                  <a:srgbClr val="B4C7D2"/>
+                  <a:srgbClr val="E7F0F3"/>
                 </a:solidFill>
                 <a:latin typeface="Arial"/>
               </a:rPr>
-              <a:t>• film surface</a:t>
-            </a:r>
-          </a:p>
-        </p:txBody>
-      </p:sp>
-      <p:sp>
-        <p:nvSpPr>
-          <p:cNvPr id="13" name="C4-E01 text 11" descr="sci-ppt:o011"/>
+              <a:t>3.2e+03</a:t>
+            </a:r>
+          </a:p>
+        </p:txBody>
+      </p:sp>
+      <p:sp>
+        <p:nvSpPr>
+          <p:cNvPr id="25" name="C4-E01 text 23" descr="sci-ppt:o023"/>
           <p:cNvSpPr txBox="1"/>
           <p:nvPr/>
         </p:nvSpPr>
         <p:spPr>
           <a:xfrm>
-            <a:off x="6217920" y="4096512"/>
-            <a:ext cx="5715000" cy="246888"/>
+            <a:off x="7653528" y="2834640"/>
+            <a:ext cx="4096512" cy="417576"/>
           </a:xfrm>
           <a:prstGeom prst="rect">
             <a:avLst/>
@@ -3480,7 +3950,7 @@
           <a:effectLst/>
         </p:spPr>
         <p:txBody>
-          <a:bodyPr wrap="square" lIns="27432" rIns="27432" tIns="18288" bIns="18288" anchor="ctr">
+          <a:bodyPr wrap="none" lIns="18288" rIns="18288" tIns="18288" bIns="18288" anchor="t">
             <a:spAutoFit/>
           </a:bodyPr>
           <a:lstStyle/>
@@ -3491,27 +3961,75 @@
               </a:spcAft>
             </a:pPr>
             <a:r>
-              <a:rPr sz="1150" b="0" i="0">
+              <a:rPr sz="1200" b="0" i="0">
                 <a:solidFill>
-                  <a:srgbClr val="B4C7D2"/>
+                  <a:srgbClr val="E7F0F3"/>
                 </a:solidFill>
                 <a:latin typeface="Arial"/>
               </a:rPr>
-              <a:t>• n_f ↓ solid → liquid</a:t>
-            </a:r>
-          </a:p>
-        </p:txBody>
-      </p:sp>
-      <p:sp>
-        <p:nvSpPr>
-          <p:cNvPr id="14" name="C4-E01 text 12" descr="sci-ppt:o012"/>
+              <a:t>Pressure acts along n; viscous stress adds a</a:t>
+            </a:r>
+          </a:p>
+          <a:p>
+            <a:pPr algn="l">
+              <a:spcAft>
+                <a:spcPts val="0"/>
+              </a:spcAft>
+            </a:pPr>
+            <a:r>
+              <a:rPr sz="1200" b="0" i="0">
+                <a:solidFill>
+                  <a:srgbClr val="E7F0F3"/>
+                </a:solidFill>
+                <a:latin typeface="Arial"/>
+              </a:rPr>
+              <a:t>tangential part.</a:t>
+            </a:r>
+          </a:p>
+        </p:txBody>
+      </p:sp>
+      <p:sp>
+        <p:nvSpPr>
+          <p:cNvPr id="26" name="C4-E01 ellipse 24" descr="sci-ppt:o024"/>
+          <p:cNvSpPr/>
+          <p:nvPr/>
+        </p:nvSpPr>
+        <p:spPr>
+          <a:xfrm>
+            <a:off x="7484364" y="2887980"/>
+            <a:ext cx="82296" cy="82296"/>
+          </a:xfrm>
+          <a:prstGeom prst="ellipse">
+            <a:avLst/>
+          </a:prstGeom>
+          <a:solidFill>
+            <a:srgbClr val="8EDBD4"/>
+          </a:solidFill>
+          <a:ln w="12700">
+            <a:solidFill>
+              <a:srgbClr val="8EDBD4"/>
+            </a:solidFill>
+          </a:ln>
+          <a:effectLst/>
+        </p:spPr>
+        <p:txBody>
+          <a:bodyPr rtlCol="0" anchor="ctr"/>
+          <a:lstStyle/>
+          <a:p>
+            <a:pPr algn="ctr"/>
+          </a:p>
+        </p:txBody>
+      </p:sp>
+      <p:sp>
+        <p:nvSpPr>
+          <p:cNvPr id="27" name="C4-E01 text 25" descr="sci-ppt:o025"/>
           <p:cNvSpPr txBox="1"/>
           <p:nvPr/>
         </p:nvSpPr>
         <p:spPr>
           <a:xfrm>
-            <a:off x="320040" y="4329684"/>
-            <a:ext cx="5715000" cy="246888"/>
+            <a:off x="7653528" y="3297936"/>
+            <a:ext cx="4096512" cy="603504"/>
           </a:xfrm>
           <a:prstGeom prst="rect">
             <a:avLst/>
@@ -3520,7 +4038,7 @@
           <a:effectLst/>
         </p:spPr>
         <p:txBody>
-          <a:bodyPr wrap="square" lIns="27432" rIns="27432" tIns="18288" bIns="18288" anchor="ctr">
+          <a:bodyPr wrap="none" lIns="18288" rIns="18288" tIns="18288" bIns="18288" anchor="t">
             <a:spAutoFit/>
           </a:bodyPr>
           <a:lstStyle/>
@@ -3531,27 +4049,91 @@
               </a:spcAft>
             </a:pPr>
             <a:r>
-              <a:rPr sz="1150" b="0" i="0">
+              <a:rPr sz="1200" b="0" i="0">
                 <a:solidFill>
-                  <a:srgbClr val="B4C7D2"/>
+                  <a:srgbClr val="E7F0F3"/>
                 </a:solidFill>
                 <a:latin typeface="Arial"/>
               </a:rPr>
-              <a:t>• p → compressive load</a:t>
-            </a:r>
-          </a:p>
-        </p:txBody>
-      </p:sp>
-      <p:sp>
-        <p:nvSpPr>
-          <p:cNvPr id="15" name="C4-E01 text 13" descr="sci-ppt:o013"/>
+              <a:t>For μ = 1 mPa s and strain rate 3×10⁶ s⁻¹ the</a:t>
+            </a:r>
+          </a:p>
+          <a:p>
+            <a:pPr algn="l">
+              <a:spcAft>
+                <a:spcPts val="0"/>
+              </a:spcAft>
+            </a:pPr>
+            <a:r>
+              <a:rPr sz="1200" b="0" i="0">
+                <a:solidFill>
+                  <a:srgbClr val="E7F0F3"/>
+                </a:solidFill>
+                <a:latin typeface="Arial"/>
+              </a:rPr>
+              <a:t>shear is thousands of Pa, far below the 47 MPa</a:t>
+            </a:r>
+          </a:p>
+          <a:p>
+            <a:pPr algn="l">
+              <a:spcAft>
+                <a:spcPts val="0"/>
+              </a:spcAft>
+            </a:pPr>
+            <a:r>
+              <a:rPr sz="1200" b="0" i="0">
+                <a:solidFill>
+                  <a:srgbClr val="E7F0F3"/>
+                </a:solidFill>
+                <a:latin typeface="Arial"/>
+              </a:rPr>
+              <a:t>contact scale.</a:t>
+            </a:r>
+          </a:p>
+        </p:txBody>
+      </p:sp>
+      <p:sp>
+        <p:nvSpPr>
+          <p:cNvPr id="28" name="C4-E01 ellipse 26" descr="sci-ppt:o026"/>
+          <p:cNvSpPr/>
+          <p:nvPr/>
+        </p:nvSpPr>
+        <p:spPr>
+          <a:xfrm>
+            <a:off x="7484364" y="3351276"/>
+            <a:ext cx="82296" cy="82296"/>
+          </a:xfrm>
+          <a:prstGeom prst="ellipse">
+            <a:avLst/>
+          </a:prstGeom>
+          <a:solidFill>
+            <a:srgbClr val="8EDBD4"/>
+          </a:solidFill>
+          <a:ln w="12700">
+            <a:solidFill>
+              <a:srgbClr val="8EDBD4"/>
+            </a:solidFill>
+          </a:ln>
+          <a:effectLst/>
+        </p:spPr>
+        <p:txBody>
+          <a:bodyPr rtlCol="0" anchor="ctr"/>
+          <a:lstStyle/>
+          <a:p>
+            <a:pPr algn="ctr"/>
+          </a:p>
+        </p:txBody>
+      </p:sp>
+      <p:sp>
+        <p:nvSpPr>
+          <p:cNvPr id="29" name="C4-E01 text 27" descr="sci-ppt:o027"/>
           <p:cNvSpPr txBox="1"/>
           <p:nvPr/>
         </p:nvSpPr>
         <p:spPr>
           <a:xfrm>
-            <a:off x="6217920" y="4329684"/>
-            <a:ext cx="5715000" cy="246888"/>
+            <a:off x="7653528" y="3947160"/>
+            <a:ext cx="4096512" cy="417576"/>
           </a:xfrm>
           <a:prstGeom prst="rect">
             <a:avLst/>
@@ -3560,7 +4142,7 @@
           <a:effectLst/>
         </p:spPr>
         <p:txBody>
-          <a:bodyPr wrap="square" lIns="27432" rIns="27432" tIns="18288" bIns="18288" anchor="ctr">
+          <a:bodyPr wrap="none" lIns="18288" rIns="18288" tIns="18288" bIns="18288" anchor="t">
             <a:spAutoFit/>
           </a:bodyPr>
           <a:lstStyle/>
@@ -3571,27 +4153,75 @@
               </a:spcAft>
             </a:pPr>
             <a:r>
-              <a:rPr sz="1150" b="0" i="0">
+              <a:rPr sz="1200" b="0" i="0">
                 <a:solidFill>
-                  <a:srgbClr val="B4C7D2"/>
+                  <a:srgbClr val="E7F0F3"/>
                 </a:solidFill>
                 <a:latin typeface="Arial"/>
               </a:rPr>
-              <a:t>• u, x, t in liquid</a:t>
-            </a:r>
-          </a:p>
-        </p:txBody>
-      </p:sp>
-      <p:sp>
-        <p:nvSpPr>
-          <p:cNvPr id="16" name="C4-E01 text 14" descr="sci-ppt:o014"/>
+              <a:t>The film feels the traction, not the liquid</a:t>
+            </a:r>
+          </a:p>
+          <a:p>
+            <a:pPr algn="l">
+              <a:spcAft>
+                <a:spcPts val="0"/>
+              </a:spcAft>
+            </a:pPr>
+            <a:r>
+              <a:rPr sz="1200" b="0" i="0">
+                <a:solidFill>
+                  <a:srgbClr val="E7F0F3"/>
+                </a:solidFill>
+                <a:latin typeface="Arial"/>
+              </a:rPr>
+              <a:t>velocity.</a:t>
+            </a:r>
+          </a:p>
+        </p:txBody>
+      </p:sp>
+      <p:sp>
+        <p:nvSpPr>
+          <p:cNvPr id="30" name="C4-E01 ellipse 28" descr="sci-ppt:o028"/>
+          <p:cNvSpPr/>
+          <p:nvPr/>
+        </p:nvSpPr>
+        <p:spPr>
+          <a:xfrm>
+            <a:off x="7484364" y="4000500"/>
+            <a:ext cx="82296" cy="82296"/>
+          </a:xfrm>
+          <a:prstGeom prst="ellipse">
+            <a:avLst/>
+          </a:prstGeom>
+          <a:solidFill>
+            <a:srgbClr val="8EDBD4"/>
+          </a:solidFill>
+          <a:ln w="12700">
+            <a:solidFill>
+              <a:srgbClr val="8EDBD4"/>
+            </a:solidFill>
+          </a:ln>
+          <a:effectLst/>
+        </p:spPr>
+        <p:txBody>
+          <a:bodyPr rtlCol="0" anchor="ctr"/>
+          <a:lstStyle/>
+          <a:p>
+            <a:pPr algn="ctr"/>
+          </a:p>
+        </p:txBody>
+      </p:sp>
+      <p:sp>
+        <p:nvSpPr>
+          <p:cNvPr id="31" name="C4-E01 text 29" descr="sci-ppt:o029"/>
           <p:cNvSpPr txBox="1"/>
           <p:nvPr/>
         </p:nvSpPr>
         <p:spPr>
           <a:xfrm>
-            <a:off x="320040" y="4562856"/>
-            <a:ext cx="5715000" cy="246888"/>
+            <a:off x="320040" y="6510528"/>
+            <a:ext cx="11521440" cy="200660"/>
           </a:xfrm>
           <a:prstGeom prst="rect">
             <a:avLst/>
@@ -3600,207 +4230,7 @@
           <a:effectLst/>
         </p:spPr>
         <p:txBody>
-          <a:bodyPr wrap="square" lIns="27432" rIns="27432" tIns="18288" bIns="18288" anchor="ctr">
-            <a:spAutoFit/>
-          </a:bodyPr>
-          <a:lstStyle/>
-          <a:p>
-            <a:pPr algn="l">
-              <a:spcAft>
-                <a:spcPts val="0"/>
-              </a:spcAft>
-            </a:pPr>
-            <a:r>
-              <a:rPr sz="1150" b="0" i="0">
-                <a:solidFill>
-                  <a:srgbClr val="B4C7D2"/>
-                </a:solidFill>
-                <a:latin typeface="Arial"/>
-              </a:rPr>
-              <a:t>• μ, D_u — shear</a:t>
-            </a:r>
-          </a:p>
-        </p:txBody>
-      </p:sp>
-      <p:sp>
-        <p:nvSpPr>
-          <p:cNvPr id="17" name="C4-E01 text 15" descr="sci-ppt:o015"/>
-          <p:cNvSpPr txBox="1"/>
-          <p:nvPr/>
-        </p:nvSpPr>
-        <p:spPr>
-          <a:xfrm>
-            <a:off x="6217920" y="4562856"/>
-            <a:ext cx="5715000" cy="246888"/>
-          </a:xfrm>
-          <a:prstGeom prst="rect">
-            <a:avLst/>
-          </a:prstGeom>
-          <a:noFill/>
-          <a:effectLst/>
-        </p:spPr>
-        <p:txBody>
-          <a:bodyPr wrap="square" lIns="27432" rIns="27432" tIns="18288" bIns="18288" anchor="ctr">
-            <a:spAutoFit/>
-          </a:bodyPr>
-          <a:lstStyle/>
-          <a:p>
-            <a:pPr algn="l">
-              <a:spcAft>
-                <a:spcPts val="0"/>
-              </a:spcAft>
-            </a:pPr>
-            <a:r>
-              <a:rPr sz="1150" b="0" i="0">
-                <a:solidFill>
-                  <a:srgbClr val="B4C7D2"/>
-                </a:solidFill>
-                <a:latin typeface="Arial"/>
-              </a:rPr>
-              <a:t>• T_l, t_l at exposed face</a:t>
-            </a:r>
-          </a:p>
-        </p:txBody>
-      </p:sp>
-      <p:sp>
-        <p:nvSpPr>
-          <p:cNvPr id="18" name="C4-E01 text 16" descr="sci-ppt:o016"/>
-          <p:cNvSpPr txBox="1"/>
-          <p:nvPr/>
-        </p:nvSpPr>
-        <p:spPr>
-          <a:xfrm>
-            <a:off x="320040" y="4796028"/>
-            <a:ext cx="5715000" cy="246888"/>
-          </a:xfrm>
-          <a:prstGeom prst="rect">
-            <a:avLst/>
-          </a:prstGeom>
-          <a:noFill/>
-          <a:effectLst/>
-        </p:spPr>
-        <p:txBody>
-          <a:bodyPr wrap="square" lIns="27432" rIns="27432" tIns="18288" bIns="18288" anchor="ctr">
-            <a:spAutoFit/>
-          </a:bodyPr>
-          <a:lstStyle/>
-          <a:p>
-            <a:pPr algn="l">
-              <a:spcAft>
-                <a:spcPts val="0"/>
-              </a:spcAft>
-            </a:pPr>
-            <a:r>
-              <a:rPr sz="1150" b="0" i="0">
-                <a:solidFill>
-                  <a:srgbClr val="B4C7D2"/>
-                </a:solidFill>
-                <a:latin typeface="Arial"/>
-              </a:rPr>
-              <a:t>• I — identity tensor</a:t>
-            </a:r>
-          </a:p>
-        </p:txBody>
-      </p:sp>
-      <p:sp>
-        <p:nvSpPr>
-          <p:cNvPr id="19" name="C4-E01 text 17" descr="sci-ppt:o017"/>
-          <p:cNvSpPr txBox="1"/>
-          <p:nvPr/>
-        </p:nvSpPr>
-        <p:spPr>
-          <a:xfrm>
-            <a:off x="320040" y="5596128"/>
-            <a:ext cx="11430000" cy="292608"/>
-          </a:xfrm>
-          <a:prstGeom prst="rect">
-            <a:avLst/>
-          </a:prstGeom>
-          <a:noFill/>
-          <a:effectLst/>
-        </p:spPr>
-        <p:txBody>
-          <a:bodyPr wrap="square" lIns="27432" rIns="27432" tIns="18288" bIns="18288" anchor="ctr">
-            <a:spAutoFit/>
-          </a:bodyPr>
-          <a:lstStyle/>
-          <a:p>
-            <a:pPr algn="l">
-              <a:spcAft>
-                <a:spcPts val="0"/>
-              </a:spcAft>
-            </a:pPr>
-            <a:r>
-              <a:rPr sz="1150" b="0" i="0">
-                <a:solidFill>
-                  <a:srgbClr val="8EDBD4"/>
-                </a:solidFill>
-                <a:latin typeface="Arial"/>
-              </a:rPr>
-              <a:t>Positive opening direction ↑</a:t>
-            </a:r>
-          </a:p>
-        </p:txBody>
-      </p:sp>
-      <p:sp>
-        <p:nvSpPr>
-          <p:cNvPr id="20" name="C4-E01 text 18" descr="sci-ppt:o018"/>
-          <p:cNvSpPr txBox="1"/>
-          <p:nvPr/>
-        </p:nvSpPr>
-        <p:spPr>
-          <a:xfrm>
-            <a:off x="320040" y="5870448"/>
-            <a:ext cx="11430000" cy="292608"/>
-          </a:xfrm>
-          <a:prstGeom prst="rect">
-            <a:avLst/>
-          </a:prstGeom>
-          <a:noFill/>
-          <a:effectLst/>
-        </p:spPr>
-        <p:txBody>
-          <a:bodyPr wrap="square" lIns="27432" rIns="27432" tIns="18288" bIns="18288" anchor="ctr">
-            <a:spAutoFit/>
-          </a:bodyPr>
-          <a:lstStyle/>
-          <a:p>
-            <a:pPr algn="l">
-              <a:spcAft>
-                <a:spcPts val="0"/>
-              </a:spcAft>
-            </a:pPr>
-            <a:r>
-              <a:rPr sz="1150" b="0" i="0">
-                <a:solidFill>
-                  <a:srgbClr val="8EDBD4"/>
-                </a:solidFill>
-                <a:latin typeface="Arial"/>
-              </a:rPr>
-              <a:t>The release interface is a separate surface.</a:t>
-            </a:r>
-          </a:p>
-        </p:txBody>
-      </p:sp>
-      <p:sp>
-        <p:nvSpPr>
-          <p:cNvPr id="21" name="C4-E01 text 19" descr="sci-ppt:o019"/>
-          <p:cNvSpPr txBox="1"/>
-          <p:nvPr/>
-        </p:nvSpPr>
-        <p:spPr>
-          <a:xfrm>
-            <a:off x="320040" y="6473952"/>
-            <a:ext cx="11430000" cy="256032"/>
-          </a:xfrm>
-          <a:prstGeom prst="rect">
-            <a:avLst/>
-          </a:prstGeom>
-          <a:noFill/>
-          <a:effectLst/>
-        </p:spPr>
-        <p:txBody>
-          <a:bodyPr wrap="square" lIns="27432" rIns="27432" tIns="18288" bIns="18288" anchor="ctr">
+          <a:bodyPr wrap="none" lIns="18288" rIns="18288" tIns="18288" bIns="18288" anchor="t">
             <a:spAutoFit/>
           </a:bodyPr>
           <a:lstStyle/>
@@ -3817,7 +4247,7 @@
                 </a:solidFill>
                 <a:latin typeface="Arial"/>
               </a:rPr>
-              <a:t>Model schematic; geometry is not to scale.</a:t>
+              <a:t>Newtonian traction of Eq. C4-E01; bar values are order-of-magnitude illustrations (log axis).</a:t>
             </a:r>
           </a:p>
         </p:txBody>
